--- a/STATSTRO 2026/STATSTRO_Poster.pptx
+++ b/STATSTRO 2026/STATSTRO_Poster.pptx
@@ -3044,7 +3044,7 @@
                 <a:cs typeface="Roboto" panose="02000000000000000000" pitchFamily="2" charset="0"/>
                 <a:sym typeface="Wingdings" panose="05000000000000000000" pitchFamily="2" charset="2"/>
               </a:rPr>
-              <a:t>We created most comprehensive model in the literature</a:t>
+              <a:t>We have created the most comprehensive interior structure model in the literature</a:t>
             </a:r>
             <a:r>
               <a:rPr lang="en-US" sz="3000" i="1" baseline="30000" dirty="0">
@@ -3152,7 +3152,7 @@
                 <a:cs typeface="Roboto" panose="02000000000000000000" pitchFamily="2" charset="0"/>
                 <a:sym typeface="Wingdings" panose="05000000000000000000" pitchFamily="2" charset="2"/>
               </a:rPr>
-              <a:t> will bring observational errors further down</a:t>
+              <a:t> will bring average observational errors further down</a:t>
             </a:r>
           </a:p>
           <a:p>
@@ -8610,7 +8610,7 @@
         <p:spPr>
           <a:xfrm>
             <a:off x="1127760" y="7717069"/>
-            <a:ext cx="9601200" cy="5997154"/>
+            <a:ext cx="9601200" cy="5555793"/>
           </a:xfrm>
           <a:prstGeom prst="rect">
             <a:avLst/>
@@ -9114,7 +9114,7 @@
         </p:nvSpPr>
         <p:spPr>
           <a:xfrm>
-            <a:off x="2233768" y="13737107"/>
+            <a:off x="3425443" y="13366957"/>
             <a:ext cx="1649811" cy="430887"/>
           </a:xfrm>
           <a:prstGeom prst="rect">
@@ -9153,7 +9153,7 @@
         </p:nvSpPr>
         <p:spPr>
           <a:xfrm>
-            <a:off x="7555566" y="13737107"/>
+            <a:off x="5968355" y="13366008"/>
             <a:ext cx="1816523" cy="430887"/>
           </a:xfrm>
           <a:prstGeom prst="rect">
@@ -9265,7 +9265,7 @@
                 <a:cs typeface="Roboto" panose="02000000000000000000" pitchFamily="2" charset="0"/>
                 <a:sym typeface="Wingdings" panose="05000000000000000000" pitchFamily="2" charset="2"/>
               </a:rPr>
-              <a:t>Runs MCMC to best retrieve planets’ radius</a:t>
+              <a:t>Runs MCMC to retrieve planets’ composition </a:t>
             </a:r>
           </a:p>
           <a:p>
@@ -9280,7 +9280,7 @@
                 <a:cs typeface="Roboto" panose="02000000000000000000" pitchFamily="2" charset="0"/>
                 <a:sym typeface="Wingdings" panose="05000000000000000000" pitchFamily="2" charset="2"/>
               </a:rPr>
-              <a:t>First application to TOI-210 b (In prep.) makes water-rich composition </a:t>
+              <a:t>First application to TOI-210 b makes water-rich composition </a:t>
             </a:r>
             <a:r>
               <a:rPr lang="en-US" sz="3000" i="1" dirty="0">
@@ -9300,6 +9300,21 @@
               </a:rPr>
               <a:t> likely</a:t>
             </a:r>
+            <a:r>
+              <a:rPr lang="en-US" sz="3000" baseline="30000" dirty="0">
+                <a:latin typeface="Roboto" panose="02000000000000000000" pitchFamily="2" charset="0"/>
+                <a:ea typeface="Roboto" panose="02000000000000000000" pitchFamily="2" charset="0"/>
+                <a:cs typeface="Roboto" panose="02000000000000000000" pitchFamily="2" charset="0"/>
+                <a:sym typeface="Wingdings" panose="05000000000000000000" pitchFamily="2" charset="2"/>
+              </a:rPr>
+              <a:t>44</a:t>
+            </a:r>
+            <a:endParaRPr lang="en-US" sz="3000" dirty="0">
+              <a:latin typeface="Roboto" panose="02000000000000000000" pitchFamily="2" charset="0"/>
+              <a:ea typeface="Roboto" panose="02000000000000000000" pitchFamily="2" charset="0"/>
+              <a:cs typeface="Roboto" panose="02000000000000000000" pitchFamily="2" charset="0"/>
+              <a:sym typeface="Wingdings" panose="05000000000000000000" pitchFamily="2" charset="2"/>
+            </a:endParaRPr>
           </a:p>
           <a:p>
             <a:pPr indent="132730" fontAlgn="base">
@@ -9313,7 +9328,16 @@
                 <a:cs typeface="Roboto" panose="02000000000000000000" pitchFamily="2" charset="0"/>
                 <a:sym typeface="Wingdings" panose="05000000000000000000" pitchFamily="2" charset="2"/>
               </a:rPr>
-              <a:t>Application to more individual targets forthcoming – email w/ requests to generate grids for specific objects</a:t>
+              <a:t>Application to more individual targets forthcoming – </a:t>
+            </a:r>
+            <a:r>
+              <a:rPr lang="en-US" sz="3000" b="1" i="1" dirty="0">
+                <a:latin typeface="Roboto" panose="02000000000000000000" pitchFamily="2" charset="0"/>
+                <a:ea typeface="Roboto" panose="02000000000000000000" pitchFamily="2" charset="0"/>
+                <a:cs typeface="Roboto" panose="02000000000000000000" pitchFamily="2" charset="0"/>
+                <a:sym typeface="Wingdings" panose="05000000000000000000" pitchFamily="2" charset="2"/>
+              </a:rPr>
+              <a:t>email w/ requests to generate grids for specific objects</a:t>
             </a:r>
           </a:p>
         </p:txBody>
@@ -9715,8 +9739,8 @@
         </p:nvSpPr>
         <p:spPr>
           <a:xfrm>
-            <a:off x="24837857" y="6709711"/>
-            <a:ext cx="4439036" cy="830997"/>
+            <a:off x="24640689" y="6709711"/>
+            <a:ext cx="4833375" cy="830997"/>
           </a:xfrm>
           <a:prstGeom prst="rect">
             <a:avLst/>
@@ -9747,7 +9771,7 @@
                 <a:ea typeface="Roboto" panose="02000000000000000000" pitchFamily="2" charset="0"/>
                 <a:cs typeface="Roboto" panose="02000000000000000000" pitchFamily="2" charset="0"/>
               </a:rPr>
-              <a:t>-&gt; H/He scenario more realistic</a:t>
+              <a:t>-&gt; H/He scenario remains realistic</a:t>
             </a:r>
           </a:p>
         </p:txBody>
@@ -10355,8 +10379,8 @@
         </p:nvSpPr>
         <p:spPr>
           <a:xfrm>
-            <a:off x="24911588" y="8997959"/>
-            <a:ext cx="4156908" cy="830997"/>
+            <a:off x="24572553" y="8755390"/>
+            <a:ext cx="4834978" cy="1200329"/>
           </a:xfrm>
           <a:prstGeom prst="rect">
             <a:avLst/>
@@ -10420,6 +10444,17 @@
                 <a:cs typeface="Roboto" panose="02000000000000000000" pitchFamily="2" charset="0"/>
               </a:rPr>
               <a:t>O scenario less realistic</a:t>
+            </a:r>
+          </a:p>
+          <a:p>
+            <a:pPr algn="ctr"/>
+            <a:r>
+              <a:rPr lang="en-US" sz="2400" dirty="0">
+                <a:latin typeface="Roboto" panose="02000000000000000000" pitchFamily="2" charset="0"/>
+                <a:ea typeface="Roboto" panose="02000000000000000000" pitchFamily="2" charset="0"/>
+                <a:cs typeface="Roboto" panose="02000000000000000000" pitchFamily="2" charset="0"/>
+              </a:rPr>
+              <a:t>(Need more water than plausible)</a:t>
             </a:r>
           </a:p>
         </p:txBody>
@@ -10602,42 +10637,6 @@
           </a:fontRef>
         </p:style>
       </p:cxnSp>
-      <p:pic>
-        <p:nvPicPr>
-          <p:cNvPr id="1067" name="Picture 1066">
-            <a:extLst>
-              <a:ext uri="{FF2B5EF4-FFF2-40B4-BE49-F238E27FC236}">
-                <a16:creationId xmlns:a16="http://schemas.microsoft.com/office/drawing/2014/main" id="{A55D3072-F1B3-5FCF-5BAD-A194E7DC79AA}"/>
-              </a:ext>
-            </a:extLst>
-          </p:cNvPr>
-          <p:cNvPicPr>
-            <a:picLocks noChangeAspect="1"/>
-          </p:cNvPicPr>
-          <p:nvPr/>
-        </p:nvPicPr>
-        <p:blipFill>
-          <a:blip r:embed="rId11" cstate="print">
-            <a:extLst>
-              <a:ext uri="{28A0092B-C50C-407E-A947-70E740481C1C}">
-                <a14:useLocalDpi xmlns:a14="http://schemas.microsoft.com/office/drawing/2010/main" val="0"/>
-              </a:ext>
-            </a:extLst>
-          </a:blip>
-          <a:stretch>
-            <a:fillRect/>
-          </a:stretch>
-        </p:blipFill>
-        <p:spPr>
-          <a:xfrm>
-            <a:off x="10077069" y="21568079"/>
-            <a:ext cx="1325499" cy="1325499"/>
-          </a:xfrm>
-          <a:prstGeom prst="rect">
-            <a:avLst/>
-          </a:prstGeom>
-        </p:spPr>
-      </p:pic>
       <p:sp>
         <p:nvSpPr>
           <p:cNvPr id="1068" name="TextBox 1067">
@@ -11689,6 +11688,245 @@
           </p:grpSp>
         </p:grpSp>
       </p:grpSp>
+      <p:pic>
+        <p:nvPicPr>
+          <p:cNvPr id="1104" name="Picture 1103">
+            <a:extLst>
+              <a:ext uri="{FF2B5EF4-FFF2-40B4-BE49-F238E27FC236}">
+                <a16:creationId xmlns:a16="http://schemas.microsoft.com/office/drawing/2014/main" id="{0FBB0704-436C-1D5D-7F3A-81B376971062}"/>
+              </a:ext>
+            </a:extLst>
+          </p:cNvPr>
+          <p:cNvPicPr>
+            <a:picLocks noChangeAspect="1"/>
+          </p:cNvPicPr>
+          <p:nvPr/>
+        </p:nvPicPr>
+        <p:blipFill>
+          <a:blip r:embed="rId12" cstate="print">
+            <a:extLst>
+              <a:ext uri="{28A0092B-C50C-407E-A947-70E740481C1C}">
+                <a14:useLocalDpi xmlns:a14="http://schemas.microsoft.com/office/drawing/2010/main" val="0"/>
+              </a:ext>
+            </a:extLst>
+          </a:blip>
+          <a:stretch>
+            <a:fillRect/>
+          </a:stretch>
+        </p:blipFill>
+        <p:spPr>
+          <a:xfrm>
+            <a:off x="10003428" y="21568079"/>
+            <a:ext cx="1289340" cy="1289340"/>
+          </a:xfrm>
+          <a:prstGeom prst="rect">
+            <a:avLst/>
+          </a:prstGeom>
+        </p:spPr>
+      </p:pic>
+      <p:cxnSp>
+        <p:nvCxnSpPr>
+          <p:cNvPr id="1106" name="Straight Arrow Connector 1105">
+            <a:extLst>
+              <a:ext uri="{FF2B5EF4-FFF2-40B4-BE49-F238E27FC236}">
+                <a16:creationId xmlns:a16="http://schemas.microsoft.com/office/drawing/2014/main" id="{A286BFBE-AAA7-4099-BE95-47E1A81F8CB2}"/>
+              </a:ext>
+            </a:extLst>
+          </p:cNvPr>
+          <p:cNvCxnSpPr>
+            <a:cxnSpLocks/>
+            <a:stCxn id="1107" idx="2"/>
+          </p:cNvCxnSpPr>
+          <p:nvPr/>
+        </p:nvCxnSpPr>
+        <p:spPr>
+          <a:xfrm flipH="1">
+            <a:off x="29771340" y="15182212"/>
+            <a:ext cx="716314" cy="816456"/>
+          </a:xfrm>
+          <a:prstGeom prst="straightConnector1">
+            <a:avLst/>
+          </a:prstGeom>
+          <a:ln>
+            <a:tailEnd type="triangle"/>
+          </a:ln>
+        </p:spPr>
+        <p:style>
+          <a:lnRef idx="2">
+            <a:schemeClr val="dk1"/>
+          </a:lnRef>
+          <a:fillRef idx="0">
+            <a:schemeClr val="dk1"/>
+          </a:fillRef>
+          <a:effectRef idx="1">
+            <a:schemeClr val="dk1"/>
+          </a:effectRef>
+          <a:fontRef idx="minor">
+            <a:schemeClr val="tx1"/>
+          </a:fontRef>
+        </p:style>
+      </p:cxnSp>
+      <p:sp>
+        <p:nvSpPr>
+          <p:cNvPr id="1107" name="TextBox 1106">
+            <a:extLst>
+              <a:ext uri="{FF2B5EF4-FFF2-40B4-BE49-F238E27FC236}">
+                <a16:creationId xmlns:a16="http://schemas.microsoft.com/office/drawing/2014/main" id="{DA46B817-262C-DAAB-C9EB-A8B921056294}"/>
+              </a:ext>
+            </a:extLst>
+          </p:cNvPr>
+          <p:cNvSpPr txBox="1"/>
+          <p:nvPr/>
+        </p:nvSpPr>
+        <p:spPr>
+          <a:xfrm>
+            <a:off x="29184669" y="14812880"/>
+            <a:ext cx="2605970" cy="369332"/>
+          </a:xfrm>
+          <a:prstGeom prst="rect">
+            <a:avLst/>
+          </a:prstGeom>
+          <a:noFill/>
+        </p:spPr>
+        <p:txBody>
+          <a:bodyPr wrap="none" rtlCol="0">
+            <a:spAutoFit/>
+          </a:bodyPr>
+          <a:lstStyle/>
+          <a:p>
+            <a:r>
+              <a:rPr lang="en-US" dirty="0"/>
+              <a:t>Star’s [M/H] -&gt; Earth-like</a:t>
+            </a:r>
+          </a:p>
+        </p:txBody>
+      </p:sp>
+      <p:sp>
+        <p:nvSpPr>
+          <p:cNvPr id="1113" name="TextBox 1112">
+            <a:extLst>
+              <a:ext uri="{FF2B5EF4-FFF2-40B4-BE49-F238E27FC236}">
+                <a16:creationId xmlns:a16="http://schemas.microsoft.com/office/drawing/2014/main" id="{E694A9B0-0E35-0CD1-4A69-9161FD856B80}"/>
+              </a:ext>
+            </a:extLst>
+          </p:cNvPr>
+          <p:cNvSpPr txBox="1"/>
+          <p:nvPr/>
+        </p:nvSpPr>
+        <p:spPr>
+          <a:xfrm>
+            <a:off x="27799614" y="13394363"/>
+            <a:ext cx="3943452" cy="923330"/>
+          </a:xfrm>
+          <a:prstGeom prst="rect">
+            <a:avLst/>
+          </a:prstGeom>
+          <a:noFill/>
+        </p:spPr>
+        <p:txBody>
+          <a:bodyPr wrap="none" rtlCol="0">
+            <a:spAutoFit/>
+          </a:bodyPr>
+          <a:lstStyle/>
+          <a:p>
+            <a:pPr algn="ctr"/>
+            <a:r>
+              <a:rPr lang="en-US" dirty="0"/>
+              <a:t>Planet’s inferred core mass from M,R</a:t>
+            </a:r>
+            <a:br>
+              <a:rPr lang="en-US" dirty="0"/>
+            </a:br>
+            <a:r>
+              <a:rPr lang="en-US" dirty="0"/>
+              <a:t>lower than if abundances from star</a:t>
+            </a:r>
+            <a:br>
+              <a:rPr lang="en-US" dirty="0"/>
+            </a:br>
+            <a:r>
+              <a:rPr lang="en-US" dirty="0"/>
+              <a:t>-&gt; core polluted by light element</a:t>
+            </a:r>
+          </a:p>
+        </p:txBody>
+      </p:sp>
+      <p:cxnSp>
+        <p:nvCxnSpPr>
+          <p:cNvPr id="1114" name="Straight Arrow Connector 1113">
+            <a:extLst>
+              <a:ext uri="{FF2B5EF4-FFF2-40B4-BE49-F238E27FC236}">
+                <a16:creationId xmlns:a16="http://schemas.microsoft.com/office/drawing/2014/main" id="{B5B9A791-8971-386A-69F8-5CEA6D415195}"/>
+              </a:ext>
+            </a:extLst>
+          </p:cNvPr>
+          <p:cNvCxnSpPr>
+            <a:cxnSpLocks/>
+          </p:cNvCxnSpPr>
+          <p:nvPr/>
+        </p:nvCxnSpPr>
+        <p:spPr>
+          <a:xfrm flipH="1">
+            <a:off x="28069799" y="14470421"/>
+            <a:ext cx="958499" cy="282266"/>
+          </a:xfrm>
+          <a:prstGeom prst="straightConnector1">
+            <a:avLst/>
+          </a:prstGeom>
+          <a:ln>
+            <a:tailEnd type="triangle"/>
+          </a:ln>
+        </p:spPr>
+        <p:style>
+          <a:lnRef idx="2">
+            <a:schemeClr val="dk1"/>
+          </a:lnRef>
+          <a:fillRef idx="0">
+            <a:schemeClr val="dk1"/>
+          </a:fillRef>
+          <a:effectRef idx="1">
+            <a:schemeClr val="dk1"/>
+          </a:effectRef>
+          <a:fontRef idx="minor">
+            <a:schemeClr val="tx1"/>
+          </a:fontRef>
+        </p:style>
+      </p:cxnSp>
+      <p:sp>
+        <p:nvSpPr>
+          <p:cNvPr id="1119" name="TextBox 1118">
+            <a:extLst>
+              <a:ext uri="{FF2B5EF4-FFF2-40B4-BE49-F238E27FC236}">
+                <a16:creationId xmlns:a16="http://schemas.microsoft.com/office/drawing/2014/main" id="{9299D9C8-25B0-A138-8985-D7175AA7769E}"/>
+              </a:ext>
+            </a:extLst>
+          </p:cNvPr>
+          <p:cNvSpPr txBox="1"/>
+          <p:nvPr/>
+        </p:nvSpPr>
+        <p:spPr>
+          <a:xfrm>
+            <a:off x="29008059" y="14285963"/>
+            <a:ext cx="2802819" cy="369332"/>
+          </a:xfrm>
+          <a:prstGeom prst="rect">
+            <a:avLst/>
+          </a:prstGeom>
+          <a:noFill/>
+        </p:spPr>
+        <p:txBody>
+          <a:bodyPr wrap="none" rtlCol="0">
+            <a:spAutoFit/>
+          </a:bodyPr>
+          <a:lstStyle/>
+          <a:p>
+            <a:r>
+              <a:rPr lang="en-US" dirty="0"/>
+              <a:t>Planet’s [M/H] -&gt; light core</a:t>
+            </a:r>
+          </a:p>
+        </p:txBody>
+      </p:sp>
     </p:spTree>
     <p:extLst>
       <p:ext uri="{BB962C8B-B14F-4D97-AF65-F5344CB8AC3E}">

--- a/STATSTRO 2026/STATSTRO_Poster.pptx
+++ b/STATSTRO 2026/STATSTRO_Poster.pptx
@@ -3452,7 +3452,7 @@
                 <a:cs typeface="Roboto" panose="02000000000000000000" pitchFamily="2" charset="0"/>
                 <a:sym typeface="Wingdings" panose="05000000000000000000" pitchFamily="2" charset="2"/>
               </a:rPr>
-              <a:t>Mass-Radius curves generated; available online</a:t>
+              <a:t>M-R Curves: https://zenodo.org/records/20382153</a:t>
             </a:r>
           </a:p>
         </p:txBody>
@@ -9114,7 +9114,7 @@
         </p:nvSpPr>
         <p:spPr>
           <a:xfrm>
-            <a:off x="3425443" y="13366957"/>
+            <a:off x="3480974" y="13360307"/>
             <a:ext cx="1649811" cy="430887"/>
           </a:xfrm>
           <a:prstGeom prst="rect">
@@ -9153,7 +9153,7 @@
         </p:nvSpPr>
         <p:spPr>
           <a:xfrm>
-            <a:off x="5968355" y="13366008"/>
+            <a:off x="6008768" y="13365842"/>
             <a:ext cx="1816523" cy="430887"/>
           </a:xfrm>
           <a:prstGeom prst="rect">
@@ -9283,7 +9283,7 @@
               <a:t>First application to TOI-210 b makes water-rich composition </a:t>
             </a:r>
             <a:r>
-              <a:rPr lang="en-US" sz="3000" i="1" dirty="0">
+              <a:rPr lang="en-US" sz="3000" i="1">
                 <a:latin typeface="Roboto" panose="02000000000000000000" pitchFamily="2" charset="0"/>
                 <a:ea typeface="Roboto" panose="02000000000000000000" pitchFamily="2" charset="0"/>
                 <a:cs typeface="Roboto" panose="02000000000000000000" pitchFamily="2" charset="0"/>
@@ -9292,16 +9292,16 @@
               <a:t>less</a:t>
             </a:r>
             <a:r>
-              <a:rPr lang="en-US" sz="3000" dirty="0">
+              <a:rPr lang="en-US" sz="3000">
                 <a:latin typeface="Roboto" panose="02000000000000000000" pitchFamily="2" charset="0"/>
                 <a:ea typeface="Roboto" panose="02000000000000000000" pitchFamily="2" charset="0"/>
                 <a:cs typeface="Roboto" panose="02000000000000000000" pitchFamily="2" charset="0"/>
                 <a:sym typeface="Wingdings" panose="05000000000000000000" pitchFamily="2" charset="2"/>
               </a:rPr>
-              <a:t> likely</a:t>
-            </a:r>
-            <a:r>
-              <a:rPr lang="en-US" sz="3000" baseline="30000" dirty="0">
+              <a:t> likely when compared to H/He-rich</a:t>
+            </a:r>
+            <a:r>
+              <a:rPr lang="en-US" sz="3000" baseline="30000">
                 <a:latin typeface="Roboto" panose="02000000000000000000" pitchFamily="2" charset="0"/>
                 <a:ea typeface="Roboto" panose="02000000000000000000" pitchFamily="2" charset="0"/>
                 <a:cs typeface="Roboto" panose="02000000000000000000" pitchFamily="2" charset="0"/>
@@ -11190,12 +11190,122 @@
           </p:grpSp>
         </p:grpSp>
       </p:grpSp>
+      <p:sp>
+        <p:nvSpPr>
+          <p:cNvPr id="49" name="TextBox 48">
+            <a:extLst>
+              <a:ext uri="{FF2B5EF4-FFF2-40B4-BE49-F238E27FC236}">
+                <a16:creationId xmlns:a16="http://schemas.microsoft.com/office/drawing/2014/main" id="{AE0E1FA5-5DA4-EEF3-102D-B81CB19318B1}"/>
+              </a:ext>
+            </a:extLst>
+          </p:cNvPr>
+          <p:cNvSpPr txBox="1"/>
+          <p:nvPr/>
+        </p:nvSpPr>
+        <p:spPr>
+          <a:xfrm>
+            <a:off x="1137411" y="16885815"/>
+            <a:ext cx="2497800" cy="312714"/>
+          </a:xfrm>
+          <a:prstGeom prst="rect">
+            <a:avLst/>
+          </a:prstGeom>
+          <a:noFill/>
+        </p:spPr>
+        <p:txBody>
+          <a:bodyPr wrap="none" rtlCol="0">
+            <a:spAutoFit/>
+          </a:bodyPr>
+          <a:lstStyle/>
+          <a:p>
+            <a:r>
+              <a:rPr lang="en-US" sz="1432" dirty="0">
+                <a:latin typeface="Roboto" panose="02000000000000000000" pitchFamily="2" charset="0"/>
+                <a:ea typeface="Roboto" panose="02000000000000000000" pitchFamily="2" charset="0"/>
+                <a:cs typeface="Roboto" panose="02000000000000000000" pitchFamily="2" charset="0"/>
+              </a:rPr>
+              <a:t>Formed mostly </a:t>
+            </a:r>
+            <a:r>
+              <a:rPr lang="en-US" sz="1432" i="1" dirty="0">
+                <a:latin typeface="Roboto" panose="02000000000000000000" pitchFamily="2" charset="0"/>
+                <a:ea typeface="Roboto" panose="02000000000000000000" pitchFamily="2" charset="0"/>
+                <a:cs typeface="Roboto" panose="02000000000000000000" pitchFamily="2" charset="0"/>
+              </a:rPr>
+              <a:t>inside</a:t>
+            </a:r>
+            <a:r>
+              <a:rPr lang="en-US" sz="1432" dirty="0">
+                <a:latin typeface="Roboto" panose="02000000000000000000" pitchFamily="2" charset="0"/>
+                <a:ea typeface="Roboto" panose="02000000000000000000" pitchFamily="2" charset="0"/>
+                <a:cs typeface="Roboto" panose="02000000000000000000" pitchFamily="2" charset="0"/>
+              </a:rPr>
+              <a:t> iceline</a:t>
+            </a:r>
+          </a:p>
+        </p:txBody>
+      </p:sp>
+      <p:sp>
+        <p:nvSpPr>
+          <p:cNvPr id="50" name="TextBox 49">
+            <a:extLst>
+              <a:ext uri="{FF2B5EF4-FFF2-40B4-BE49-F238E27FC236}">
+                <a16:creationId xmlns:a16="http://schemas.microsoft.com/office/drawing/2014/main" id="{1554438F-47F9-96A5-1C4B-11A2B76D02EF}"/>
+              </a:ext>
+            </a:extLst>
+          </p:cNvPr>
+          <p:cNvSpPr txBox="1"/>
+          <p:nvPr/>
+        </p:nvSpPr>
+        <p:spPr>
+          <a:xfrm>
+            <a:off x="8034882" y="16885815"/>
+            <a:ext cx="2613216" cy="312714"/>
+          </a:xfrm>
+          <a:prstGeom prst="rect">
+            <a:avLst/>
+          </a:prstGeom>
+          <a:noFill/>
+        </p:spPr>
+        <p:txBody>
+          <a:bodyPr wrap="none" rtlCol="0">
+            <a:spAutoFit/>
+          </a:bodyPr>
+          <a:lstStyle/>
+          <a:p>
+            <a:r>
+              <a:rPr lang="en-US" sz="1432" dirty="0">
+                <a:latin typeface="Roboto" panose="02000000000000000000" pitchFamily="2" charset="0"/>
+                <a:ea typeface="Roboto" panose="02000000000000000000" pitchFamily="2" charset="0"/>
+                <a:cs typeface="Roboto" panose="02000000000000000000" pitchFamily="2" charset="0"/>
+              </a:rPr>
+              <a:t>Formed mostly </a:t>
+            </a:r>
+            <a:r>
+              <a:rPr lang="en-US" sz="1432" i="1" dirty="0">
+                <a:latin typeface="Roboto" panose="02000000000000000000" pitchFamily="2" charset="0"/>
+                <a:ea typeface="Roboto" panose="02000000000000000000" pitchFamily="2" charset="0"/>
+                <a:cs typeface="Roboto" panose="02000000000000000000" pitchFamily="2" charset="0"/>
+              </a:rPr>
+              <a:t>outside</a:t>
+            </a:r>
+            <a:r>
+              <a:rPr lang="en-US" sz="1432" dirty="0">
+                <a:latin typeface="Roboto" panose="02000000000000000000" pitchFamily="2" charset="0"/>
+                <a:ea typeface="Roboto" panose="02000000000000000000" pitchFamily="2" charset="0"/>
+                <a:cs typeface="Roboto" panose="02000000000000000000" pitchFamily="2" charset="0"/>
+              </a:rPr>
+              <a:t> iceline</a:t>
+            </a:r>
+          </a:p>
+        </p:txBody>
+      </p:sp>
       <p:grpSp>
         <p:nvGrpSpPr>
-          <p:cNvPr id="1092" name="Group 1091">
+          <p:cNvPr id="1072" name="Group 1071">
             <a:extLst>
               <a:ext uri="{FF2B5EF4-FFF2-40B4-BE49-F238E27FC236}">
-                <a16:creationId xmlns:a16="http://schemas.microsoft.com/office/drawing/2014/main" id="{6AD86144-E590-68E6-56A7-5861779E7FC8}"/>
+                <a16:creationId xmlns:a16="http://schemas.microsoft.com/office/drawing/2014/main" id="{6C529C08-1D1B-B0C4-D4E5-DF3767D74AD5}"/>
               </a:ext>
             </a:extLst>
           </p:cNvPr>
@@ -11204,128 +11314,221 @@
         </p:nvGrpSpPr>
         <p:grpSpPr>
           <a:xfrm>
-            <a:off x="1135891" y="16205695"/>
-            <a:ext cx="9512207" cy="1672955"/>
-            <a:chOff x="1127760" y="16147559"/>
-            <a:chExt cx="9512207" cy="1672955"/>
+            <a:off x="3687328" y="16484521"/>
+            <a:ext cx="1115303" cy="1115303"/>
+            <a:chOff x="7357382" y="14718163"/>
+            <a:chExt cx="1115303" cy="1115303"/>
           </a:xfrm>
         </p:grpSpPr>
         <p:sp>
           <p:nvSpPr>
-            <p:cNvPr id="49" name="TextBox 48">
+            <p:cNvPr id="1073" name="Oval 1072">
               <a:extLst>
                 <a:ext uri="{FF2B5EF4-FFF2-40B4-BE49-F238E27FC236}">
-                  <a16:creationId xmlns:a16="http://schemas.microsoft.com/office/drawing/2014/main" id="{AE0E1FA5-5DA4-EEF3-102D-B81CB19318B1}"/>
+                  <a16:creationId xmlns:a16="http://schemas.microsoft.com/office/drawing/2014/main" id="{CA1CDB17-A21D-F2CA-53BD-45AA8AE34410}"/>
                 </a:ext>
               </a:extLst>
             </p:cNvPr>
-            <p:cNvSpPr txBox="1"/>
+            <p:cNvSpPr/>
             <p:nvPr/>
           </p:nvSpPr>
           <p:spPr>
             <a:xfrm>
-              <a:off x="1127760" y="16758755"/>
-              <a:ext cx="2497800" cy="312714"/>
+              <a:off x="7357382" y="14718163"/>
+              <a:ext cx="1115303" cy="1115303"/>
             </a:xfrm>
-            <a:prstGeom prst="rect">
+            <a:prstGeom prst="ellipse">
               <a:avLst/>
             </a:prstGeom>
-            <a:noFill/>
+            <a:solidFill>
+              <a:schemeClr val="accent3">
+                <a:lumMod val="75000"/>
+              </a:schemeClr>
+            </a:solidFill>
+            <a:ln>
+              <a:solidFill>
+                <a:schemeClr val="accent3">
+                  <a:lumMod val="75000"/>
+                </a:schemeClr>
+              </a:solidFill>
+            </a:ln>
           </p:spPr>
+          <p:style>
+            <a:lnRef idx="2">
+              <a:schemeClr val="accent1">
+                <a:shade val="15000"/>
+              </a:schemeClr>
+            </a:lnRef>
+            <a:fillRef idx="1">
+              <a:schemeClr val="accent1"/>
+            </a:fillRef>
+            <a:effectRef idx="0">
+              <a:schemeClr val="accent1"/>
+            </a:effectRef>
+            <a:fontRef idx="minor">
+              <a:schemeClr val="lt1"/>
+            </a:fontRef>
+          </p:style>
           <p:txBody>
-            <a:bodyPr wrap="none" rtlCol="0">
-              <a:spAutoFit/>
-            </a:bodyPr>
+            <a:bodyPr rtlCol="0" anchor="ctr"/>
             <a:lstStyle/>
             <a:p>
-              <a:r>
-                <a:rPr lang="en-US" sz="1432" dirty="0">
-                  <a:latin typeface="Roboto" panose="02000000000000000000" pitchFamily="2" charset="0"/>
-                  <a:ea typeface="Roboto" panose="02000000000000000000" pitchFamily="2" charset="0"/>
-                  <a:cs typeface="Roboto" panose="02000000000000000000" pitchFamily="2" charset="0"/>
-                </a:rPr>
-                <a:t>Formed mostly </a:t>
-              </a:r>
-              <a:r>
-                <a:rPr lang="en-US" sz="1432" i="1" dirty="0">
-                  <a:latin typeface="Roboto" panose="02000000000000000000" pitchFamily="2" charset="0"/>
-                  <a:ea typeface="Roboto" panose="02000000000000000000" pitchFamily="2" charset="0"/>
-                  <a:cs typeface="Roboto" panose="02000000000000000000" pitchFamily="2" charset="0"/>
-                </a:rPr>
-                <a:t>inside</a:t>
-              </a:r>
-              <a:r>
-                <a:rPr lang="en-US" sz="1432" dirty="0">
-                  <a:latin typeface="Roboto" panose="02000000000000000000" pitchFamily="2" charset="0"/>
-                  <a:ea typeface="Roboto" panose="02000000000000000000" pitchFamily="2" charset="0"/>
-                  <a:cs typeface="Roboto" panose="02000000000000000000" pitchFamily="2" charset="0"/>
-                </a:rPr>
-                <a:t> iceline</a:t>
-              </a:r>
+              <a:pPr algn="ctr"/>
+              <a:endParaRPr lang="en-US" sz="744">
+                <a:solidFill>
+                  <a:schemeClr val="accent6">
+                    <a:lumMod val="75000"/>
+                  </a:schemeClr>
+                </a:solidFill>
+              </a:endParaRPr>
             </a:p>
           </p:txBody>
         </p:sp>
         <p:sp>
           <p:nvSpPr>
-            <p:cNvPr id="50" name="TextBox 49">
+            <p:cNvPr id="1074" name="Oval 1073">
               <a:extLst>
                 <a:ext uri="{FF2B5EF4-FFF2-40B4-BE49-F238E27FC236}">
-                  <a16:creationId xmlns:a16="http://schemas.microsoft.com/office/drawing/2014/main" id="{1554438F-47F9-96A5-1C4B-11A2B76D02EF}"/>
+                  <a16:creationId xmlns:a16="http://schemas.microsoft.com/office/drawing/2014/main" id="{1B9FDC91-3843-73C9-5CDB-3F0887BDCF6E}"/>
                 </a:ext>
               </a:extLst>
             </p:cNvPr>
-            <p:cNvSpPr txBox="1"/>
+            <p:cNvSpPr/>
             <p:nvPr/>
           </p:nvSpPr>
           <p:spPr>
             <a:xfrm>
-              <a:off x="8026751" y="16827679"/>
-              <a:ext cx="2613216" cy="312714"/>
+              <a:off x="7636207" y="14996989"/>
+              <a:ext cx="557653" cy="557652"/>
             </a:xfrm>
-            <a:prstGeom prst="rect">
+            <a:prstGeom prst="ellipse">
               <a:avLst/>
             </a:prstGeom>
-            <a:noFill/>
+            <a:solidFill>
+              <a:schemeClr val="bg2">
+                <a:lumMod val="50000"/>
+              </a:schemeClr>
+            </a:solidFill>
+            <a:ln>
+              <a:solidFill>
+                <a:schemeClr val="bg2">
+                  <a:lumMod val="50000"/>
+                </a:schemeClr>
+              </a:solidFill>
+            </a:ln>
           </p:spPr>
+          <p:style>
+            <a:lnRef idx="2">
+              <a:schemeClr val="accent1">
+                <a:shade val="15000"/>
+              </a:schemeClr>
+            </a:lnRef>
+            <a:fillRef idx="1">
+              <a:schemeClr val="accent1"/>
+            </a:fillRef>
+            <a:effectRef idx="0">
+              <a:schemeClr val="accent1"/>
+            </a:effectRef>
+            <a:fontRef idx="minor">
+              <a:schemeClr val="lt1"/>
+            </a:fontRef>
+          </p:style>
           <p:txBody>
-            <a:bodyPr wrap="none" rtlCol="0">
-              <a:spAutoFit/>
-            </a:bodyPr>
+            <a:bodyPr rtlCol="0" anchor="ctr"/>
             <a:lstStyle/>
             <a:p>
-              <a:r>
-                <a:rPr lang="en-US" sz="1432" dirty="0">
-                  <a:latin typeface="Roboto" panose="02000000000000000000" pitchFamily="2" charset="0"/>
-                  <a:ea typeface="Roboto" panose="02000000000000000000" pitchFamily="2" charset="0"/>
-                  <a:cs typeface="Roboto" panose="02000000000000000000" pitchFamily="2" charset="0"/>
-                </a:rPr>
-                <a:t>Formed mostly </a:t>
-              </a:r>
-              <a:r>
-                <a:rPr lang="en-US" sz="1432" i="1" dirty="0">
-                  <a:latin typeface="Roboto" panose="02000000000000000000" pitchFamily="2" charset="0"/>
-                  <a:ea typeface="Roboto" panose="02000000000000000000" pitchFamily="2" charset="0"/>
-                  <a:cs typeface="Roboto" panose="02000000000000000000" pitchFamily="2" charset="0"/>
-                </a:rPr>
-                <a:t>outside</a:t>
-              </a:r>
-              <a:r>
-                <a:rPr lang="en-US" sz="1432" dirty="0">
-                  <a:latin typeface="Roboto" panose="02000000000000000000" pitchFamily="2" charset="0"/>
-                  <a:ea typeface="Roboto" panose="02000000000000000000" pitchFamily="2" charset="0"/>
-                  <a:cs typeface="Roboto" panose="02000000000000000000" pitchFamily="2" charset="0"/>
-                </a:rPr>
-                <a:t> iceline</a:t>
-              </a:r>
+              <a:pPr algn="ctr"/>
+              <a:endParaRPr lang="en-US" sz="744"/>
+            </a:p>
+          </p:txBody>
+        </p:sp>
+      </p:grpSp>
+      <p:grpSp>
+        <p:nvGrpSpPr>
+          <p:cNvPr id="1086" name="Group 1085">
+            <a:extLst>
+              <a:ext uri="{FF2B5EF4-FFF2-40B4-BE49-F238E27FC236}">
+                <a16:creationId xmlns:a16="http://schemas.microsoft.com/office/drawing/2014/main" id="{F680C6D6-5DE2-6135-1E08-789A3577D43B}"/>
+              </a:ext>
+            </a:extLst>
+          </p:cNvPr>
+          <p:cNvGrpSpPr/>
+          <p:nvPr/>
+        </p:nvGrpSpPr>
+        <p:grpSpPr>
+          <a:xfrm>
+            <a:off x="6080551" y="16205695"/>
+            <a:ext cx="1672956" cy="1672955"/>
+            <a:chOff x="7107571" y="16228621"/>
+            <a:chExt cx="1672956" cy="1672955"/>
+          </a:xfrm>
+        </p:grpSpPr>
+        <p:sp>
+          <p:nvSpPr>
+            <p:cNvPr id="1078" name="Oval 1077">
+              <a:extLst>
+                <a:ext uri="{FF2B5EF4-FFF2-40B4-BE49-F238E27FC236}">
+                  <a16:creationId xmlns:a16="http://schemas.microsoft.com/office/drawing/2014/main" id="{7AA8C9D3-04D0-1ED3-6580-B2A5B630AED5}"/>
+                </a:ext>
+              </a:extLst>
+            </p:cNvPr>
+            <p:cNvSpPr/>
+            <p:nvPr/>
+          </p:nvSpPr>
+          <p:spPr>
+            <a:xfrm>
+              <a:off x="7107571" y="16228621"/>
+              <a:ext cx="1672956" cy="1672955"/>
+            </a:xfrm>
+            <a:prstGeom prst="ellipse">
+              <a:avLst/>
+            </a:prstGeom>
+            <a:solidFill>
+              <a:schemeClr val="tx2">
+                <a:lumMod val="75000"/>
+                <a:lumOff val="25000"/>
+              </a:schemeClr>
+            </a:solidFill>
+            <a:ln>
+              <a:solidFill>
+                <a:schemeClr val="tx2">
+                  <a:lumMod val="75000"/>
+                  <a:lumOff val="25000"/>
+                </a:schemeClr>
+              </a:solidFill>
+            </a:ln>
+          </p:spPr>
+          <p:style>
+            <a:lnRef idx="2">
+              <a:schemeClr val="accent1">
+                <a:shade val="15000"/>
+              </a:schemeClr>
+            </a:lnRef>
+            <a:fillRef idx="1">
+              <a:schemeClr val="accent1"/>
+            </a:fillRef>
+            <a:effectRef idx="0">
+              <a:schemeClr val="accent1"/>
+            </a:effectRef>
+            <a:fontRef idx="minor">
+              <a:schemeClr val="lt1"/>
+            </a:fontRef>
+          </p:style>
+          <p:txBody>
+            <a:bodyPr rtlCol="0" anchor="ctr"/>
+            <a:lstStyle/>
+            <a:p>
+              <a:pPr algn="ctr"/>
+              <a:endParaRPr lang="en-US" sz="744"/>
             </a:p>
           </p:txBody>
         </p:sp>
         <p:grpSp>
           <p:nvGrpSpPr>
-            <p:cNvPr id="1072" name="Group 1071">
+            <p:cNvPr id="1079" name="Group 1078">
               <a:extLst>
                 <a:ext uri="{FF2B5EF4-FFF2-40B4-BE49-F238E27FC236}">
-                  <a16:creationId xmlns:a16="http://schemas.microsoft.com/office/drawing/2014/main" id="{6C529C08-1D1B-B0C4-D4E5-DF3767D74AD5}"/>
+                  <a16:creationId xmlns:a16="http://schemas.microsoft.com/office/drawing/2014/main" id="{55E5AF46-F1FB-5710-FAF3-F070A4DC9869}"/>
                 </a:ext>
               </a:extLst>
             </p:cNvPr>
@@ -11334,7 +11537,7 @@
           </p:nvGrpSpPr>
           <p:grpSpPr>
             <a:xfrm>
-              <a:off x="3752663" y="16362868"/>
+              <a:off x="7386397" y="16507447"/>
               <a:ext cx="1115303" cy="1115303"/>
               <a:chOff x="7357382" y="14718163"/>
               <a:chExt cx="1115303" cy="1115303"/>
@@ -11342,10 +11545,10 @@
           </p:grpSpPr>
           <p:sp>
             <p:nvSpPr>
-              <p:cNvPr id="1073" name="Oval 1072">
+              <p:cNvPr id="1081" name="Oval 1080">
                 <a:extLst>
                   <a:ext uri="{FF2B5EF4-FFF2-40B4-BE49-F238E27FC236}">
-                    <a16:creationId xmlns:a16="http://schemas.microsoft.com/office/drawing/2014/main" id="{CA1CDB17-A21D-F2CA-53BD-45AA8AE34410}"/>
+                    <a16:creationId xmlns:a16="http://schemas.microsoft.com/office/drawing/2014/main" id="{52274617-EB4F-6EE0-1754-1073E6C1DB84}"/>
                   </a:ext>
                 </a:extLst>
               </p:cNvPr>
@@ -11406,10 +11609,10 @@
           </p:sp>
           <p:sp>
             <p:nvSpPr>
-              <p:cNvPr id="1074" name="Oval 1073">
+              <p:cNvPr id="1084" name="Oval 1083">
                 <a:extLst>
                   <a:ext uri="{FF2B5EF4-FFF2-40B4-BE49-F238E27FC236}">
-                    <a16:creationId xmlns:a16="http://schemas.microsoft.com/office/drawing/2014/main" id="{1B9FDC91-3843-73C9-5CDB-3F0887BDCF6E}"/>
+                    <a16:creationId xmlns:a16="http://schemas.microsoft.com/office/drawing/2014/main" id="{28241F99-5FBE-E680-B0B7-430853FC07CC}"/>
                   </a:ext>
                 </a:extLst>
               </p:cNvPr>
@@ -11462,230 +11665,6 @@
               </a:p>
             </p:txBody>
           </p:sp>
-        </p:grpSp>
-        <p:grpSp>
-          <p:nvGrpSpPr>
-            <p:cNvPr id="1086" name="Group 1085">
-              <a:extLst>
-                <a:ext uri="{FF2B5EF4-FFF2-40B4-BE49-F238E27FC236}">
-                  <a16:creationId xmlns:a16="http://schemas.microsoft.com/office/drawing/2014/main" id="{F680C6D6-5DE2-6135-1E08-789A3577D43B}"/>
-                </a:ext>
-              </a:extLst>
-            </p:cNvPr>
-            <p:cNvGrpSpPr/>
-            <p:nvPr/>
-          </p:nvGrpSpPr>
-          <p:grpSpPr>
-            <a:xfrm>
-              <a:off x="6035758" y="16147559"/>
-              <a:ext cx="1672956" cy="1672955"/>
-              <a:chOff x="7107571" y="16228621"/>
-              <a:chExt cx="1672956" cy="1672955"/>
-            </a:xfrm>
-          </p:grpSpPr>
-          <p:sp>
-            <p:nvSpPr>
-              <p:cNvPr id="1078" name="Oval 1077">
-                <a:extLst>
-                  <a:ext uri="{FF2B5EF4-FFF2-40B4-BE49-F238E27FC236}">
-                    <a16:creationId xmlns:a16="http://schemas.microsoft.com/office/drawing/2014/main" id="{7AA8C9D3-04D0-1ED3-6580-B2A5B630AED5}"/>
-                  </a:ext>
-                </a:extLst>
-              </p:cNvPr>
-              <p:cNvSpPr/>
-              <p:nvPr/>
-            </p:nvSpPr>
-            <p:spPr>
-              <a:xfrm>
-                <a:off x="7107571" y="16228621"/>
-                <a:ext cx="1672956" cy="1672955"/>
-              </a:xfrm>
-              <a:prstGeom prst="ellipse">
-                <a:avLst/>
-              </a:prstGeom>
-              <a:solidFill>
-                <a:schemeClr val="tx2">
-                  <a:lumMod val="75000"/>
-                  <a:lumOff val="25000"/>
-                </a:schemeClr>
-              </a:solidFill>
-              <a:ln>
-                <a:solidFill>
-                  <a:schemeClr val="tx2">
-                    <a:lumMod val="75000"/>
-                    <a:lumOff val="25000"/>
-                  </a:schemeClr>
-                </a:solidFill>
-              </a:ln>
-            </p:spPr>
-            <p:style>
-              <a:lnRef idx="2">
-                <a:schemeClr val="accent1">
-                  <a:shade val="15000"/>
-                </a:schemeClr>
-              </a:lnRef>
-              <a:fillRef idx="1">
-                <a:schemeClr val="accent1"/>
-              </a:fillRef>
-              <a:effectRef idx="0">
-                <a:schemeClr val="accent1"/>
-              </a:effectRef>
-              <a:fontRef idx="minor">
-                <a:schemeClr val="lt1"/>
-              </a:fontRef>
-            </p:style>
-            <p:txBody>
-              <a:bodyPr rtlCol="0" anchor="ctr"/>
-              <a:lstStyle/>
-              <a:p>
-                <a:pPr algn="ctr"/>
-                <a:endParaRPr lang="en-US" sz="744"/>
-              </a:p>
-            </p:txBody>
-          </p:sp>
-          <p:grpSp>
-            <p:nvGrpSpPr>
-              <p:cNvPr id="1079" name="Group 1078">
-                <a:extLst>
-                  <a:ext uri="{FF2B5EF4-FFF2-40B4-BE49-F238E27FC236}">
-                    <a16:creationId xmlns:a16="http://schemas.microsoft.com/office/drawing/2014/main" id="{55E5AF46-F1FB-5710-FAF3-F070A4DC9869}"/>
-                  </a:ext>
-                </a:extLst>
-              </p:cNvPr>
-              <p:cNvGrpSpPr/>
-              <p:nvPr/>
-            </p:nvGrpSpPr>
-            <p:grpSpPr>
-              <a:xfrm>
-                <a:off x="7386397" y="16507447"/>
-                <a:ext cx="1115303" cy="1115303"/>
-                <a:chOff x="7357382" y="14718163"/>
-                <a:chExt cx="1115303" cy="1115303"/>
-              </a:xfrm>
-            </p:grpSpPr>
-            <p:sp>
-              <p:nvSpPr>
-                <p:cNvPr id="1081" name="Oval 1080">
-                  <a:extLst>
-                    <a:ext uri="{FF2B5EF4-FFF2-40B4-BE49-F238E27FC236}">
-                      <a16:creationId xmlns:a16="http://schemas.microsoft.com/office/drawing/2014/main" id="{52274617-EB4F-6EE0-1754-1073E6C1DB84}"/>
-                    </a:ext>
-                  </a:extLst>
-                </p:cNvPr>
-                <p:cNvSpPr/>
-                <p:nvPr/>
-              </p:nvSpPr>
-              <p:spPr>
-                <a:xfrm>
-                  <a:off x="7357382" y="14718163"/>
-                  <a:ext cx="1115303" cy="1115303"/>
-                </a:xfrm>
-                <a:prstGeom prst="ellipse">
-                  <a:avLst/>
-                </a:prstGeom>
-                <a:solidFill>
-                  <a:schemeClr val="accent3">
-                    <a:lumMod val="75000"/>
-                  </a:schemeClr>
-                </a:solidFill>
-                <a:ln>
-                  <a:solidFill>
-                    <a:schemeClr val="accent3">
-                      <a:lumMod val="75000"/>
-                    </a:schemeClr>
-                  </a:solidFill>
-                </a:ln>
-              </p:spPr>
-              <p:style>
-                <a:lnRef idx="2">
-                  <a:schemeClr val="accent1">
-                    <a:shade val="15000"/>
-                  </a:schemeClr>
-                </a:lnRef>
-                <a:fillRef idx="1">
-                  <a:schemeClr val="accent1"/>
-                </a:fillRef>
-                <a:effectRef idx="0">
-                  <a:schemeClr val="accent1"/>
-                </a:effectRef>
-                <a:fontRef idx="minor">
-                  <a:schemeClr val="lt1"/>
-                </a:fontRef>
-              </p:style>
-              <p:txBody>
-                <a:bodyPr rtlCol="0" anchor="ctr"/>
-                <a:lstStyle/>
-                <a:p>
-                  <a:pPr algn="ctr"/>
-                  <a:endParaRPr lang="en-US" sz="744">
-                    <a:solidFill>
-                      <a:schemeClr val="accent6">
-                        <a:lumMod val="75000"/>
-                      </a:schemeClr>
-                    </a:solidFill>
-                  </a:endParaRPr>
-                </a:p>
-              </p:txBody>
-            </p:sp>
-            <p:sp>
-              <p:nvSpPr>
-                <p:cNvPr id="1084" name="Oval 1083">
-                  <a:extLst>
-                    <a:ext uri="{FF2B5EF4-FFF2-40B4-BE49-F238E27FC236}">
-                      <a16:creationId xmlns:a16="http://schemas.microsoft.com/office/drawing/2014/main" id="{28241F99-5FBE-E680-B0B7-430853FC07CC}"/>
-                    </a:ext>
-                  </a:extLst>
-                </p:cNvPr>
-                <p:cNvSpPr/>
-                <p:nvPr/>
-              </p:nvSpPr>
-              <p:spPr>
-                <a:xfrm>
-                  <a:off x="7636207" y="14996989"/>
-                  <a:ext cx="557653" cy="557652"/>
-                </a:xfrm>
-                <a:prstGeom prst="ellipse">
-                  <a:avLst/>
-                </a:prstGeom>
-                <a:solidFill>
-                  <a:schemeClr val="bg2">
-                    <a:lumMod val="50000"/>
-                  </a:schemeClr>
-                </a:solidFill>
-                <a:ln>
-                  <a:solidFill>
-                    <a:schemeClr val="bg2">
-                      <a:lumMod val="50000"/>
-                    </a:schemeClr>
-                  </a:solidFill>
-                </a:ln>
-              </p:spPr>
-              <p:style>
-                <a:lnRef idx="2">
-                  <a:schemeClr val="accent1">
-                    <a:shade val="15000"/>
-                  </a:schemeClr>
-                </a:lnRef>
-                <a:fillRef idx="1">
-                  <a:schemeClr val="accent1"/>
-                </a:fillRef>
-                <a:effectRef idx="0">
-                  <a:schemeClr val="accent1"/>
-                </a:effectRef>
-                <a:fontRef idx="minor">
-                  <a:schemeClr val="lt1"/>
-                </a:fontRef>
-              </p:style>
-              <p:txBody>
-                <a:bodyPr rtlCol="0" anchor="ctr"/>
-                <a:lstStyle/>
-                <a:p>
-                  <a:pPr algn="ctr"/>
-                  <a:endParaRPr lang="en-US" sz="744"/>
-                </a:p>
-              </p:txBody>
-            </p:sp>
-          </p:grpSp>
         </p:grpSp>
       </p:grpSp>
       <p:pic>
@@ -11741,8 +11720,8 @@
         </p:nvCxnSpPr>
         <p:spPr>
           <a:xfrm flipH="1">
-            <a:off x="29771340" y="15182212"/>
-            <a:ext cx="716314" cy="816456"/>
+            <a:off x="29662120" y="14991520"/>
+            <a:ext cx="806470" cy="846927"/>
           </a:xfrm>
           <a:prstGeom prst="straightConnector1">
             <a:avLst/>
@@ -11780,8 +11759,8 @@
         </p:nvSpPr>
         <p:spPr>
           <a:xfrm>
-            <a:off x="29184669" y="14812880"/>
-            <a:ext cx="2605970" cy="369332"/>
+            <a:off x="29070899" y="14622188"/>
+            <a:ext cx="2795381" cy="369332"/>
           </a:xfrm>
           <a:prstGeom prst="rect">
             <a:avLst/>
@@ -11796,7 +11775,7 @@
           <a:p>
             <a:r>
               <a:rPr lang="en-US" dirty="0"/>
-              <a:t>Star’s [M/H] -&gt; Earth-like</a:t>
+              <a:t>Star’s [Fe/Mg] -&gt; Earth-like</a:t>
             </a:r>
           </a:p>
         </p:txBody>
@@ -11907,7 +11886,7 @@
         <p:spPr>
           <a:xfrm>
             <a:off x="29008059" y="14285963"/>
-            <a:ext cx="2802819" cy="369332"/>
+            <a:ext cx="2631298" cy="369332"/>
           </a:xfrm>
           <a:prstGeom prst="rect">
             <a:avLst/>
@@ -11922,7 +11901,7 @@
           <a:p>
             <a:r>
               <a:rPr lang="en-US" dirty="0"/>
-              <a:t>Planet’s [M/H] -&gt; light core</a:t>
+              <a:t>Planet’s M,R -&gt; light core</a:t>
             </a:r>
           </a:p>
         </p:txBody>
